--- a/chat_course/week06_rooms_naive/Week06_방_엉성한버전.pptx
+++ b/chat_course/week06_rooms_naive/Week06_방_엉성한버전.pptx
@@ -5,7 +5,7 @@
     <p:sldMasterId id="2147483648" r:id="rId1"/>
   </p:sldMasterIdLst>
   <p:notesMasterIdLst>
-    <p:notesMasterId r:id="rId13"/>
+    <p:notesMasterId r:id="rId14"/>
   </p:notesMasterIdLst>
   <p:sldIdLst>
     <p:sldId id="256" r:id="rId2"/>
@@ -19,6 +19,7 @@
     <p:sldId id="264" r:id="rId10"/>
     <p:sldId id="265" r:id="rId11"/>
     <p:sldId id="266" r:id="rId12"/>
+    <p:sldId id="267" r:id="rId13"/>
   </p:sldIdLst>
   <p:sldSz cx="12192000" cy="6858000"/>
   <p:notesSz cx="6858000" cy="9144000"/>
@@ -1305,7 +1306,7 @@
           <a:p>
             <a:fld id="{5BCAD085-E8A6-8845-BD4E-CB4CCA059FC4}" type="datetimeFigureOut">
               <a:rPr lang="en-US" smtClean="0"/>
-              <a:t>7/30/2026</a:t>
+              <a:t>8/13/2026</a:t>
             </a:fld>
             <a:endParaRPr lang="en-US"/>
           </a:p>
@@ -1473,7 +1474,7 @@
           <a:p>
             <a:fld id="{5BCAD085-E8A6-8845-BD4E-CB4CCA059FC4}" type="datetimeFigureOut">
               <a:rPr lang="en-US" smtClean="0"/>
-              <a:t>7/30/2026</a:t>
+              <a:t>8/13/2026</a:t>
             </a:fld>
             <a:endParaRPr lang="en-US"/>
           </a:p>
@@ -1651,7 +1652,7 @@
           <a:p>
             <a:fld id="{5BCAD085-E8A6-8845-BD4E-CB4CCA059FC4}" type="datetimeFigureOut">
               <a:rPr lang="en-US" smtClean="0"/>
-              <a:t>7/30/2026</a:t>
+              <a:t>8/13/2026</a:t>
             </a:fld>
             <a:endParaRPr lang="en-US"/>
           </a:p>
@@ -1819,7 +1820,7 @@
           <a:p>
             <a:fld id="{5BCAD085-E8A6-8845-BD4E-CB4CCA059FC4}" type="datetimeFigureOut">
               <a:rPr lang="en-US" smtClean="0"/>
-              <a:t>7/30/2026</a:t>
+              <a:t>8/13/2026</a:t>
             </a:fld>
             <a:endParaRPr lang="en-US"/>
           </a:p>
@@ -2064,7 +2065,7 @@
           <a:p>
             <a:fld id="{5BCAD085-E8A6-8845-BD4E-CB4CCA059FC4}" type="datetimeFigureOut">
               <a:rPr lang="en-US" smtClean="0"/>
-              <a:t>7/30/2026</a:t>
+              <a:t>8/13/2026</a:t>
             </a:fld>
             <a:endParaRPr lang="en-US"/>
           </a:p>
@@ -2349,7 +2350,7 @@
           <a:p>
             <a:fld id="{5BCAD085-E8A6-8845-BD4E-CB4CCA059FC4}" type="datetimeFigureOut">
               <a:rPr lang="en-US" smtClean="0"/>
-              <a:t>7/30/2026</a:t>
+              <a:t>8/13/2026</a:t>
             </a:fld>
             <a:endParaRPr lang="en-US"/>
           </a:p>
@@ -2768,7 +2769,7 @@
           <a:p>
             <a:fld id="{5BCAD085-E8A6-8845-BD4E-CB4CCA059FC4}" type="datetimeFigureOut">
               <a:rPr lang="en-US" smtClean="0"/>
-              <a:t>7/30/2026</a:t>
+              <a:t>8/13/2026</a:t>
             </a:fld>
             <a:endParaRPr lang="en-US"/>
           </a:p>
@@ -2885,7 +2886,7 @@
           <a:p>
             <a:fld id="{5BCAD085-E8A6-8845-BD4E-CB4CCA059FC4}" type="datetimeFigureOut">
               <a:rPr lang="en-US" smtClean="0"/>
-              <a:t>7/30/2026</a:t>
+              <a:t>8/13/2026</a:t>
             </a:fld>
             <a:endParaRPr lang="en-US"/>
           </a:p>
@@ -2980,7 +2981,7 @@
           <a:p>
             <a:fld id="{5BCAD085-E8A6-8845-BD4E-CB4CCA059FC4}" type="datetimeFigureOut">
               <a:rPr lang="en-US" smtClean="0"/>
-              <a:t>7/30/2026</a:t>
+              <a:t>8/13/2026</a:t>
             </a:fld>
             <a:endParaRPr lang="en-US"/>
           </a:p>
@@ -3255,7 +3256,7 @@
           <a:p>
             <a:fld id="{5BCAD085-E8A6-8845-BD4E-CB4CCA059FC4}" type="datetimeFigureOut">
               <a:rPr lang="en-US" smtClean="0"/>
-              <a:t>7/30/2026</a:t>
+              <a:t>8/13/2026</a:t>
             </a:fld>
             <a:endParaRPr lang="en-US"/>
           </a:p>
@@ -3507,7 +3508,7 @@
           <a:p>
             <a:fld id="{5BCAD085-E8A6-8845-BD4E-CB4CCA059FC4}" type="datetimeFigureOut">
               <a:rPr lang="en-US" smtClean="0"/>
-              <a:t>7/30/2026</a:t>
+              <a:t>8/13/2026</a:t>
             </a:fld>
             <a:endParaRPr lang="en-US"/>
           </a:p>
@@ -3718,7 +3719,7 @@
           <a:p>
             <a:fld id="{5BCAD085-E8A6-8845-BD4E-CB4CCA059FC4}" type="datetimeFigureOut">
               <a:rPr lang="en-US" smtClean="0"/>
-              <a:t>7/30/2026</a:t>
+              <a:t>8/13/2026</a:t>
             </a:fld>
             <a:endParaRPr lang="en-US"/>
           </a:p>
@@ -4218,14 +4219,74 @@
               </a:spcAft>
             </a:pPr>
             <a:r>
-              <a:rPr sz="4400" b="1">
+              <a:rPr sz="4400" b="1" dirty="0" err="1">
                 <a:solidFill>
                   <a:srgbClr val="FFFFFF"/>
                 </a:solidFill>
                 <a:latin typeface="맑은 고딕"/>
               </a:rPr>
-              <a:t>방을 나눠보자 — 일단 엉성하게</a:t>
-            </a:r>
+              <a:t>방을</a:t>
+            </a:r>
+            <a:r>
+              <a:rPr sz="4400" b="1" dirty="0">
+                <a:solidFill>
+                  <a:srgbClr val="FFFFFF"/>
+                </a:solidFill>
+                <a:latin typeface="맑은 고딕"/>
+              </a:rPr>
+              <a:t> </a:t>
+            </a:r>
+            <a:r>
+              <a:rPr sz="4400" b="1" dirty="0" err="1">
+                <a:solidFill>
+                  <a:srgbClr val="FFFFFF"/>
+                </a:solidFill>
+                <a:latin typeface="맑은 고딕"/>
+              </a:rPr>
+              <a:t>나눠보자</a:t>
+            </a:r>
+            <a:r>
+              <a:rPr sz="4400" b="1" dirty="0">
+                <a:solidFill>
+                  <a:srgbClr val="FFFFFF"/>
+                </a:solidFill>
+                <a:latin typeface="맑은 고딕"/>
+              </a:rPr>
+              <a:t> — </a:t>
+            </a:r>
+            <a:r>
+              <a:rPr sz="4400" b="1" dirty="0" err="1">
+                <a:solidFill>
+                  <a:srgbClr val="FFFFFF"/>
+                </a:solidFill>
+                <a:latin typeface="맑은 고딕"/>
+              </a:rPr>
+              <a:t>일단</a:t>
+            </a:r>
+            <a:r>
+              <a:rPr sz="4400" b="1" dirty="0">
+                <a:solidFill>
+                  <a:srgbClr val="FFFFFF"/>
+                </a:solidFill>
+                <a:latin typeface="맑은 고딕"/>
+              </a:rPr>
+              <a:t> </a:t>
+            </a:r>
+            <a:r>
+              <a:rPr sz="4400" b="1" dirty="0" err="1">
+                <a:solidFill>
+                  <a:srgbClr val="FFFFFF"/>
+                </a:solidFill>
+                <a:latin typeface="맑은 고딕"/>
+              </a:rPr>
+              <a:t>엉성하게</a:t>
+            </a:r>
+            <a:endParaRPr sz="4400" b="1" dirty="0">
+              <a:solidFill>
+                <a:srgbClr val="FFFFFF"/>
+              </a:solidFill>
+              <a:latin typeface="맑은 고딕"/>
+            </a:endParaRPr>
           </a:p>
         </p:txBody>
       </p:sp>
@@ -5083,14 +5144,137 @@
               </a:spcAft>
             </a:pPr>
             <a:r>
-              <a:rPr sz="2200" b="1">
+              <a:rPr sz="2200" b="1" dirty="0">
                 <a:solidFill>
                   <a:srgbClr val="222933"/>
                 </a:solidFill>
                 <a:latin typeface="맑은 고딕"/>
               </a:rPr>
-              <a:t>•  /who 를 개선해 닉네임과 방 이름을 함께 보기 좋게 표시</a:t>
-            </a:r>
+              <a:t>•  /who 를 </a:t>
+            </a:r>
+            <a:r>
+              <a:rPr sz="2200" b="1" dirty="0" err="1">
+                <a:solidFill>
+                  <a:srgbClr val="222933"/>
+                </a:solidFill>
+                <a:latin typeface="맑은 고딕"/>
+              </a:rPr>
+              <a:t>개선해</a:t>
+            </a:r>
+            <a:r>
+              <a:rPr sz="2200" b="1" dirty="0">
+                <a:solidFill>
+                  <a:srgbClr val="222933"/>
+                </a:solidFill>
+                <a:latin typeface="맑은 고딕"/>
+              </a:rPr>
+              <a:t> </a:t>
+            </a:r>
+            <a:r>
+              <a:rPr sz="2200" b="1" dirty="0" err="1">
+                <a:solidFill>
+                  <a:srgbClr val="222933"/>
+                </a:solidFill>
+                <a:latin typeface="맑은 고딕"/>
+              </a:rPr>
+              <a:t>닉네임과</a:t>
+            </a:r>
+            <a:r>
+              <a:rPr sz="2200" b="1" dirty="0">
+                <a:solidFill>
+                  <a:srgbClr val="222933"/>
+                </a:solidFill>
+                <a:latin typeface="맑은 고딕"/>
+              </a:rPr>
+              <a:t> 방 </a:t>
+            </a:r>
+            <a:r>
+              <a:rPr sz="2200" b="1" dirty="0" err="1">
+                <a:solidFill>
+                  <a:srgbClr val="222933"/>
+                </a:solidFill>
+                <a:latin typeface="맑은 고딕"/>
+              </a:rPr>
+              <a:t>이름을</a:t>
+            </a:r>
+            <a:r>
+              <a:rPr sz="2200" b="1" dirty="0">
+                <a:solidFill>
+                  <a:srgbClr val="222933"/>
+                </a:solidFill>
+                <a:latin typeface="맑은 고딕"/>
+              </a:rPr>
+              <a:t> </a:t>
+            </a:r>
+            <a:r>
+              <a:rPr sz="2200" b="1" dirty="0" err="1">
+                <a:solidFill>
+                  <a:srgbClr val="222933"/>
+                </a:solidFill>
+                <a:latin typeface="맑은 고딕"/>
+              </a:rPr>
+              <a:t>함께</a:t>
+            </a:r>
+            <a:r>
+              <a:rPr sz="2200" b="1" dirty="0">
+                <a:solidFill>
+                  <a:srgbClr val="222933"/>
+                </a:solidFill>
+                <a:latin typeface="맑은 고딕"/>
+              </a:rPr>
+              <a:t> </a:t>
+            </a:r>
+            <a:r>
+              <a:rPr sz="2200" b="1" dirty="0" err="1">
+                <a:solidFill>
+                  <a:srgbClr val="222933"/>
+                </a:solidFill>
+                <a:latin typeface="맑은 고딕"/>
+              </a:rPr>
+              <a:t>보기</a:t>
+            </a:r>
+            <a:r>
+              <a:rPr sz="2200" b="1" dirty="0">
+                <a:solidFill>
+                  <a:srgbClr val="222933"/>
+                </a:solidFill>
+                <a:latin typeface="맑은 고딕"/>
+              </a:rPr>
+              <a:t> </a:t>
+            </a:r>
+            <a:r>
+              <a:rPr sz="2200" b="1" dirty="0" err="1">
+                <a:solidFill>
+                  <a:srgbClr val="222933"/>
+                </a:solidFill>
+                <a:latin typeface="맑은 고딕"/>
+              </a:rPr>
+              <a:t>좋게</a:t>
+            </a:r>
+            <a:r>
+              <a:rPr sz="2200" b="1" dirty="0">
+                <a:solidFill>
+                  <a:srgbClr val="222933"/>
+                </a:solidFill>
+                <a:latin typeface="맑은 고딕"/>
+              </a:rPr>
+              <a:t> </a:t>
+            </a:r>
+            <a:r>
+              <a:rPr sz="2200" b="1" dirty="0" err="1">
+                <a:solidFill>
+                  <a:srgbClr val="222933"/>
+                </a:solidFill>
+                <a:latin typeface="맑은 고딕"/>
+              </a:rPr>
+              <a:t>표시</a:t>
+            </a:r>
+            <a:endParaRPr sz="2200" b="1" dirty="0">
+              <a:solidFill>
+                <a:srgbClr val="222933"/>
+              </a:solidFill>
+              <a:latin typeface="맑은 고딕"/>
+            </a:endParaRPr>
           </a:p>
           <a:p>
             <a:pPr>
@@ -5102,14 +5286,137 @@
               </a:spcAft>
             </a:pPr>
             <a:r>
-              <a:rPr sz="2200" b="1">
+              <a:rPr sz="2200" b="1" dirty="0">
                 <a:solidFill>
                   <a:srgbClr val="222933"/>
                 </a:solidFill>
                 <a:latin typeface="맑은 고딕"/>
               </a:rPr>
-              <a:t>•  전역 상태 때문에 생기는 버그 '일부러' 만나보기</a:t>
-            </a:r>
+              <a:t>•  </a:t>
+            </a:r>
+            <a:r>
+              <a:rPr sz="2200" b="1" dirty="0" err="1">
+                <a:solidFill>
+                  <a:srgbClr val="222933"/>
+                </a:solidFill>
+                <a:latin typeface="맑은 고딕"/>
+              </a:rPr>
+              <a:t>전역</a:t>
+            </a:r>
+            <a:r>
+              <a:rPr sz="2200" b="1" dirty="0">
+                <a:solidFill>
+                  <a:srgbClr val="222933"/>
+                </a:solidFill>
+                <a:latin typeface="맑은 고딕"/>
+              </a:rPr>
+              <a:t> </a:t>
+            </a:r>
+            <a:r>
+              <a:rPr sz="2200" b="1" dirty="0" err="1">
+                <a:solidFill>
+                  <a:srgbClr val="222933"/>
+                </a:solidFill>
+                <a:latin typeface="맑은 고딕"/>
+              </a:rPr>
+              <a:t>상태</a:t>
+            </a:r>
+            <a:r>
+              <a:rPr sz="2200" b="1" dirty="0">
+                <a:solidFill>
+                  <a:srgbClr val="222933"/>
+                </a:solidFill>
+                <a:latin typeface="맑은 고딕"/>
+              </a:rPr>
+              <a:t> </a:t>
+            </a:r>
+            <a:r>
+              <a:rPr sz="2200" b="1" dirty="0" err="1">
+                <a:solidFill>
+                  <a:srgbClr val="222933"/>
+                </a:solidFill>
+                <a:latin typeface="맑은 고딕"/>
+              </a:rPr>
+              <a:t>때문에</a:t>
+            </a:r>
+            <a:r>
+              <a:rPr sz="2200" b="1" dirty="0">
+                <a:solidFill>
+                  <a:srgbClr val="222933"/>
+                </a:solidFill>
+                <a:latin typeface="맑은 고딕"/>
+              </a:rPr>
+              <a:t> </a:t>
+            </a:r>
+            <a:r>
+              <a:rPr sz="2200" b="1" dirty="0" err="1">
+                <a:solidFill>
+                  <a:srgbClr val="222933"/>
+                </a:solidFill>
+                <a:latin typeface="맑은 고딕"/>
+              </a:rPr>
+              <a:t>생기는</a:t>
+            </a:r>
+            <a:r>
+              <a:rPr sz="2200" b="1" dirty="0">
+                <a:solidFill>
+                  <a:srgbClr val="222933"/>
+                </a:solidFill>
+                <a:latin typeface="맑은 고딕"/>
+              </a:rPr>
+              <a:t> </a:t>
+            </a:r>
+            <a:r>
+              <a:rPr sz="2200" b="1" dirty="0" err="1">
+                <a:solidFill>
+                  <a:srgbClr val="222933"/>
+                </a:solidFill>
+                <a:latin typeface="맑은 고딕"/>
+              </a:rPr>
+              <a:t>버그</a:t>
+            </a:r>
+            <a:r>
+              <a:rPr sz="2200" b="1" dirty="0">
+                <a:solidFill>
+                  <a:srgbClr val="222933"/>
+                </a:solidFill>
+                <a:latin typeface="맑은 고딕"/>
+              </a:rPr>
+              <a:t> '</a:t>
+            </a:r>
+            <a:r>
+              <a:rPr sz="2200" b="1" dirty="0" err="1">
+                <a:solidFill>
+                  <a:srgbClr val="222933"/>
+                </a:solidFill>
+                <a:latin typeface="맑은 고딕"/>
+              </a:rPr>
+              <a:t>일부러</a:t>
+            </a:r>
+            <a:r>
+              <a:rPr sz="2200" b="1" dirty="0">
+                <a:solidFill>
+                  <a:srgbClr val="222933"/>
+                </a:solidFill>
+                <a:latin typeface="맑은 고딕"/>
+              </a:rPr>
+              <a:t>' </a:t>
+            </a:r>
+            <a:r>
+              <a:rPr sz="2200" b="1" dirty="0" err="1">
+                <a:solidFill>
+                  <a:srgbClr val="222933"/>
+                </a:solidFill>
+                <a:latin typeface="맑은 고딕"/>
+              </a:rPr>
+              <a:t>만나보기</a:t>
+            </a:r>
+            <a:endParaRPr sz="2200" b="1" dirty="0">
+              <a:solidFill>
+                <a:srgbClr val="222933"/>
+              </a:solidFill>
+              <a:latin typeface="맑은 고딕"/>
+            </a:endParaRPr>
           </a:p>
           <a:p>
             <a:pPr>
@@ -5121,14 +5428,191 @@
               </a:spcAft>
             </a:pPr>
             <a:r>
-              <a:rPr sz="1900" b="0">
+              <a:rPr sz="1900" b="0" dirty="0">
                 <a:solidFill>
                   <a:srgbClr val="6B7A8C"/>
                 </a:solidFill>
                 <a:latin typeface="맑은 고딕"/>
               </a:rPr>
-              <a:t>–  rooms 정리 한 줄을 주석 처리하고 방을 옮겨 보세요 → 유령 회원 발생</a:t>
-            </a:r>
+              <a:t>–  rooms </a:t>
+            </a:r>
+            <a:r>
+              <a:rPr sz="1900" b="0" dirty="0" err="1">
+                <a:solidFill>
+                  <a:srgbClr val="6B7A8C"/>
+                </a:solidFill>
+                <a:latin typeface="맑은 고딕"/>
+              </a:rPr>
+              <a:t>정리</a:t>
+            </a:r>
+            <a:r>
+              <a:rPr sz="1900" b="0" dirty="0">
+                <a:solidFill>
+                  <a:srgbClr val="6B7A8C"/>
+                </a:solidFill>
+                <a:latin typeface="맑은 고딕"/>
+              </a:rPr>
+              <a:t> 한 </a:t>
+            </a:r>
+            <a:r>
+              <a:rPr sz="1900" b="0" dirty="0" err="1">
+                <a:solidFill>
+                  <a:srgbClr val="6B7A8C"/>
+                </a:solidFill>
+                <a:latin typeface="맑은 고딕"/>
+              </a:rPr>
+              <a:t>줄을</a:t>
+            </a:r>
+            <a:r>
+              <a:rPr sz="1900" b="0" dirty="0">
+                <a:solidFill>
+                  <a:srgbClr val="6B7A8C"/>
+                </a:solidFill>
+                <a:latin typeface="맑은 고딕"/>
+              </a:rPr>
+              <a:t> </a:t>
+            </a:r>
+            <a:r>
+              <a:rPr sz="1900" b="0" dirty="0" err="1">
+                <a:solidFill>
+                  <a:srgbClr val="6B7A8C"/>
+                </a:solidFill>
+                <a:latin typeface="맑은 고딕"/>
+              </a:rPr>
+              <a:t>주석</a:t>
+            </a:r>
+            <a:r>
+              <a:rPr sz="1900" b="0" dirty="0">
+                <a:solidFill>
+                  <a:srgbClr val="6B7A8C"/>
+                </a:solidFill>
+                <a:latin typeface="맑은 고딕"/>
+              </a:rPr>
+              <a:t> </a:t>
+            </a:r>
+            <a:r>
+              <a:rPr sz="1900" b="0" dirty="0" err="1">
+                <a:solidFill>
+                  <a:srgbClr val="6B7A8C"/>
+                </a:solidFill>
+                <a:latin typeface="맑은 고딕"/>
+              </a:rPr>
+              <a:t>처리하고</a:t>
+            </a:r>
+            <a:r>
+              <a:rPr sz="1900" b="0" dirty="0">
+                <a:solidFill>
+                  <a:srgbClr val="6B7A8C"/>
+                </a:solidFill>
+                <a:latin typeface="맑은 고딕"/>
+              </a:rPr>
+              <a:t> </a:t>
+            </a:r>
+            <a:r>
+              <a:rPr sz="1900" b="0" dirty="0" err="1">
+                <a:solidFill>
+                  <a:srgbClr val="6B7A8C"/>
+                </a:solidFill>
+                <a:latin typeface="맑은 고딕"/>
+              </a:rPr>
+              <a:t>방을</a:t>
+            </a:r>
+            <a:r>
+              <a:rPr sz="1900" b="0" dirty="0">
+                <a:solidFill>
+                  <a:srgbClr val="6B7A8C"/>
+                </a:solidFill>
+                <a:latin typeface="맑은 고딕"/>
+              </a:rPr>
+              <a:t> </a:t>
+            </a:r>
+            <a:r>
+              <a:rPr sz="1900" b="0" dirty="0" err="1">
+                <a:solidFill>
+                  <a:srgbClr val="6B7A8C"/>
+                </a:solidFill>
+                <a:latin typeface="맑은 고딕"/>
+              </a:rPr>
+              <a:t>옮겨</a:t>
+            </a:r>
+            <a:r>
+              <a:rPr sz="1900" b="0" dirty="0">
+                <a:solidFill>
+                  <a:srgbClr val="6B7A8C"/>
+                </a:solidFill>
+                <a:latin typeface="맑은 고딕"/>
+              </a:rPr>
+              <a:t> </a:t>
+            </a:r>
+            <a:r>
+              <a:rPr sz="1900" b="0" dirty="0" err="1">
+                <a:solidFill>
+                  <a:srgbClr val="6B7A8C"/>
+                </a:solidFill>
+                <a:latin typeface="맑은 고딕"/>
+              </a:rPr>
+              <a:t>보세요</a:t>
+            </a:r>
+            <a:r>
+              <a:rPr sz="1900" b="0" dirty="0">
+                <a:solidFill>
+                  <a:srgbClr val="6B7A8C"/>
+                </a:solidFill>
+                <a:latin typeface="맑은 고딕"/>
+              </a:rPr>
+              <a:t> → </a:t>
+            </a:r>
+            <a:r>
+              <a:rPr sz="1900" b="0" dirty="0" err="1">
+                <a:solidFill>
+                  <a:srgbClr val="6B7A8C"/>
+                </a:solidFill>
+                <a:latin typeface="맑은 고딕"/>
+              </a:rPr>
+              <a:t>유령</a:t>
+            </a:r>
+            <a:r>
+              <a:rPr sz="1900" b="0" dirty="0">
+                <a:solidFill>
+                  <a:srgbClr val="6B7A8C"/>
+                </a:solidFill>
+                <a:latin typeface="맑은 고딕"/>
+              </a:rPr>
+              <a:t> </a:t>
+            </a:r>
+            <a:r>
+              <a:rPr sz="1900" b="0" dirty="0" err="1">
+                <a:solidFill>
+                  <a:srgbClr val="6B7A8C"/>
+                </a:solidFill>
+                <a:latin typeface="맑은 고딕"/>
+              </a:rPr>
+              <a:t>회원</a:t>
+            </a:r>
+            <a:r>
+              <a:rPr sz="1900" b="0" dirty="0">
+                <a:solidFill>
+                  <a:srgbClr val="6B7A8C"/>
+                </a:solidFill>
+                <a:latin typeface="맑은 고딕"/>
+              </a:rPr>
+              <a:t> </a:t>
+            </a:r>
+            <a:r>
+              <a:rPr sz="1900" b="0" dirty="0" err="1">
+                <a:solidFill>
+                  <a:srgbClr val="6B7A8C"/>
+                </a:solidFill>
+                <a:latin typeface="맑은 고딕"/>
+              </a:rPr>
+              <a:t>발생</a:t>
+            </a:r>
+            <a:endParaRPr sz="1900" b="0" dirty="0">
+              <a:solidFill>
+                <a:srgbClr val="6B7A8C"/>
+              </a:solidFill>
+              <a:latin typeface="맑은 고딕"/>
+            </a:endParaRPr>
           </a:p>
           <a:p>
             <a:pPr>
@@ -5140,14 +5624,101 @@
               </a:spcAft>
             </a:pPr>
             <a:r>
-              <a:rPr sz="2200" b="1">
+              <a:rPr sz="2200" b="1" dirty="0">
                 <a:solidFill>
                   <a:srgbClr val="222933"/>
                 </a:solidFill>
                 <a:latin typeface="맑은 고딕"/>
               </a:rPr>
-              <a:t>•  빈 방이 되면 자동으로 삭제되게 해보기</a:t>
-            </a:r>
+              <a:t>•  빈 </a:t>
+            </a:r>
+            <a:r>
+              <a:rPr sz="2200" b="1" dirty="0" err="1">
+                <a:solidFill>
+                  <a:srgbClr val="222933"/>
+                </a:solidFill>
+                <a:latin typeface="맑은 고딕"/>
+              </a:rPr>
+              <a:t>방이</a:t>
+            </a:r>
+            <a:r>
+              <a:rPr sz="2200" b="1" dirty="0">
+                <a:solidFill>
+                  <a:srgbClr val="222933"/>
+                </a:solidFill>
+                <a:latin typeface="맑은 고딕"/>
+              </a:rPr>
+              <a:t> </a:t>
+            </a:r>
+            <a:r>
+              <a:rPr sz="2200" b="1" dirty="0" err="1">
+                <a:solidFill>
+                  <a:srgbClr val="222933"/>
+                </a:solidFill>
+                <a:latin typeface="맑은 고딕"/>
+              </a:rPr>
+              <a:t>되면</a:t>
+            </a:r>
+            <a:r>
+              <a:rPr sz="2200" b="1" dirty="0">
+                <a:solidFill>
+                  <a:srgbClr val="222933"/>
+                </a:solidFill>
+                <a:latin typeface="맑은 고딕"/>
+              </a:rPr>
+              <a:t> </a:t>
+            </a:r>
+            <a:r>
+              <a:rPr sz="2200" b="1" dirty="0" err="1">
+                <a:solidFill>
+                  <a:srgbClr val="222933"/>
+                </a:solidFill>
+                <a:latin typeface="맑은 고딕"/>
+              </a:rPr>
+              <a:t>자동으로</a:t>
+            </a:r>
+            <a:r>
+              <a:rPr sz="2200" b="1" dirty="0">
+                <a:solidFill>
+                  <a:srgbClr val="222933"/>
+                </a:solidFill>
+                <a:latin typeface="맑은 고딕"/>
+              </a:rPr>
+              <a:t> </a:t>
+            </a:r>
+            <a:r>
+              <a:rPr sz="2200" b="1" dirty="0" err="1">
+                <a:solidFill>
+                  <a:srgbClr val="222933"/>
+                </a:solidFill>
+                <a:latin typeface="맑은 고딕"/>
+              </a:rPr>
+              <a:t>삭제되게</a:t>
+            </a:r>
+            <a:r>
+              <a:rPr sz="2200" b="1" dirty="0">
+                <a:solidFill>
+                  <a:srgbClr val="222933"/>
+                </a:solidFill>
+                <a:latin typeface="맑은 고딕"/>
+              </a:rPr>
+              <a:t> </a:t>
+            </a:r>
+            <a:r>
+              <a:rPr sz="2200" b="1" dirty="0" err="1">
+                <a:solidFill>
+                  <a:srgbClr val="222933"/>
+                </a:solidFill>
+                <a:latin typeface="맑은 고딕"/>
+              </a:rPr>
+              <a:t>해보기</a:t>
+            </a:r>
+            <a:endParaRPr sz="2200" b="1" dirty="0">
+              <a:solidFill>
+                <a:srgbClr val="222933"/>
+              </a:solidFill>
+              <a:latin typeface="맑은 고딕"/>
+            </a:endParaRPr>
           </a:p>
           <a:p>
             <a:pPr>
@@ -5159,18 +5730,222 @@
               </a:spcAft>
             </a:pPr>
             <a:r>
-              <a:rPr sz="2200" b="1">
+              <a:rPr sz="2200" b="1" dirty="0">
                 <a:solidFill>
                   <a:srgbClr val="222933"/>
                 </a:solidFill>
                 <a:latin typeface="맑은 고딕"/>
               </a:rPr>
-              <a:t>•  (생각) 방 하나에 필요한 정보(이름·멤버·기록)를 한 곳에 모으면 어떨까?</a:t>
+              <a:t>•  (</a:t>
+            </a:r>
+            <a:r>
+              <a:rPr sz="2200" b="1" dirty="0" err="1">
+                <a:solidFill>
+                  <a:srgbClr val="222933"/>
+                </a:solidFill>
+                <a:latin typeface="맑은 고딕"/>
+              </a:rPr>
+              <a:t>생각</a:t>
+            </a:r>
+            <a:r>
+              <a:rPr sz="2200" b="1" dirty="0">
+                <a:solidFill>
+                  <a:srgbClr val="222933"/>
+                </a:solidFill>
+                <a:latin typeface="맑은 고딕"/>
+              </a:rPr>
+              <a:t>) 방 </a:t>
+            </a:r>
+            <a:r>
+              <a:rPr sz="2200" b="1" dirty="0" err="1">
+                <a:solidFill>
+                  <a:srgbClr val="222933"/>
+                </a:solidFill>
+                <a:latin typeface="맑은 고딕"/>
+              </a:rPr>
+              <a:t>하나에</a:t>
+            </a:r>
+            <a:r>
+              <a:rPr sz="2200" b="1" dirty="0">
+                <a:solidFill>
+                  <a:srgbClr val="222933"/>
+                </a:solidFill>
+                <a:latin typeface="맑은 고딕"/>
+              </a:rPr>
+              <a:t> </a:t>
+            </a:r>
+            <a:r>
+              <a:rPr sz="2200" b="1" dirty="0" err="1">
+                <a:solidFill>
+                  <a:srgbClr val="222933"/>
+                </a:solidFill>
+                <a:latin typeface="맑은 고딕"/>
+              </a:rPr>
+              <a:t>필요한</a:t>
+            </a:r>
+            <a:r>
+              <a:rPr sz="2200" b="1" dirty="0">
+                <a:solidFill>
+                  <a:srgbClr val="222933"/>
+                </a:solidFill>
+                <a:latin typeface="맑은 고딕"/>
+              </a:rPr>
+              <a:t> </a:t>
+            </a:r>
+            <a:r>
+              <a:rPr sz="2200" b="1" dirty="0" err="1">
+                <a:solidFill>
+                  <a:srgbClr val="222933"/>
+                </a:solidFill>
+                <a:latin typeface="맑은 고딕"/>
+              </a:rPr>
+              <a:t>정보</a:t>
+            </a:r>
+            <a:r>
+              <a:rPr sz="2200" b="1" dirty="0">
+                <a:solidFill>
+                  <a:srgbClr val="222933"/>
+                </a:solidFill>
+                <a:latin typeface="맑은 고딕"/>
+              </a:rPr>
+              <a:t>(</a:t>
+            </a:r>
+            <a:r>
+              <a:rPr sz="2200" b="1" dirty="0" err="1">
+                <a:solidFill>
+                  <a:srgbClr val="222933"/>
+                </a:solidFill>
+                <a:latin typeface="맑은 고딕"/>
+              </a:rPr>
+              <a:t>이름·멤버·기록</a:t>
+            </a:r>
+            <a:r>
+              <a:rPr sz="2200" b="1" dirty="0">
+                <a:solidFill>
+                  <a:srgbClr val="222933"/>
+                </a:solidFill>
+                <a:latin typeface="맑은 고딕"/>
+              </a:rPr>
+              <a:t>)를 한 </a:t>
+            </a:r>
+            <a:r>
+              <a:rPr sz="2200" b="1" dirty="0" err="1">
+                <a:solidFill>
+                  <a:srgbClr val="222933"/>
+                </a:solidFill>
+                <a:latin typeface="맑은 고딕"/>
+              </a:rPr>
+              <a:t>곳에</a:t>
+            </a:r>
+            <a:r>
+              <a:rPr sz="2200" b="1" dirty="0">
+                <a:solidFill>
+                  <a:srgbClr val="222933"/>
+                </a:solidFill>
+                <a:latin typeface="맑은 고딕"/>
+              </a:rPr>
+              <a:t> </a:t>
+            </a:r>
+            <a:r>
+              <a:rPr sz="2200" b="1" dirty="0" err="1">
+                <a:solidFill>
+                  <a:srgbClr val="222933"/>
+                </a:solidFill>
+                <a:latin typeface="맑은 고딕"/>
+              </a:rPr>
+              <a:t>모으면</a:t>
+            </a:r>
+            <a:r>
+              <a:rPr sz="2200" b="1" dirty="0">
+                <a:solidFill>
+                  <a:srgbClr val="222933"/>
+                </a:solidFill>
+                <a:latin typeface="맑은 고딕"/>
+              </a:rPr>
+              <a:t> </a:t>
+            </a:r>
+            <a:r>
+              <a:rPr sz="2200" b="1" dirty="0" err="1">
+                <a:solidFill>
+                  <a:srgbClr val="222933"/>
+                </a:solidFill>
+                <a:latin typeface="맑은 고딕"/>
+              </a:rPr>
+              <a:t>어떨까</a:t>
+            </a:r>
+            <a:r>
+              <a:rPr sz="2200" b="1" dirty="0">
+                <a:solidFill>
+                  <a:srgbClr val="222933"/>
+                </a:solidFill>
+                <a:latin typeface="맑은 고딕"/>
+              </a:rPr>
+              <a:t>?</a:t>
             </a:r>
           </a:p>
         </p:txBody>
       </p:sp>
     </p:spTree>
+  </p:cSld>
+  <p:clrMapOvr>
+    <a:masterClrMapping/>
+  </p:clrMapOvr>
+</p:sld>
+</file>
+
+<file path=ppt/slides/slide12.xml><?xml version="1.0" encoding="utf-8"?>
+<p:sld xmlns:a="http://schemas.openxmlformats.org/drawingml/2006/main" xmlns:r="http://schemas.openxmlformats.org/officeDocument/2006/relationships" xmlns:p="http://schemas.openxmlformats.org/presentationml/2006/main">
+  <p:cSld>
+    <p:spTree>
+      <p:nvGrpSpPr>
+        <p:cNvPr id="1" name=""/>
+        <p:cNvGrpSpPr/>
+        <p:nvPr/>
+      </p:nvGrpSpPr>
+      <p:grpSpPr>
+        <a:xfrm>
+          <a:off x="0" y="0"/>
+          <a:ext cx="0" cy="0"/>
+          <a:chOff x="0" y="0"/>
+          <a:chExt cx="0" cy="0"/>
+        </a:xfrm>
+      </p:grpSpPr>
+      <p:pic>
+        <p:nvPicPr>
+          <p:cNvPr id="7" name="그림 6">
+            <a:extLst>
+              <a:ext uri="{FF2B5EF4-FFF2-40B4-BE49-F238E27FC236}">
+                <a16:creationId xmlns:a16="http://schemas.microsoft.com/office/drawing/2014/main" id="{7F917A0A-913B-E2BF-89A8-09EDEC90D56C}"/>
+              </a:ext>
+            </a:extLst>
+          </p:cNvPr>
+          <p:cNvPicPr>
+            <a:picLocks noChangeAspect="1"/>
+          </p:cNvPicPr>
+          <p:nvPr/>
+        </p:nvPicPr>
+        <p:blipFill>
+          <a:blip r:embed="rId2"/>
+          <a:stretch>
+            <a:fillRect/>
+          </a:stretch>
+        </p:blipFill>
+        <p:spPr>
+          <a:xfrm>
+            <a:off x="0" y="651726"/>
+            <a:ext cx="12192000" cy="5554548"/>
+          </a:xfrm>
+          <a:prstGeom prst="rect">
+            <a:avLst/>
+          </a:prstGeom>
+        </p:spPr>
+      </p:pic>
+    </p:spTree>
+    <p:extLst>
+      <p:ext uri="{BB962C8B-B14F-4D97-AF65-F5344CB8AC3E}">
+        <p14:creationId xmlns:p14="http://schemas.microsoft.com/office/powerpoint/2010/main" val="811247568"/>
+      </p:ext>
+    </p:extLst>
   </p:cSld>
   <p:clrMapOvr>
     <a:masterClrMapping/>
@@ -5542,13 +6317,103 @@
               </a:spcAft>
             </a:pPr>
             <a:r>
-              <a:rPr sz="2200" b="1">
+              <a:rPr sz="2200" b="1" dirty="0">
                 <a:solidFill>
                   <a:srgbClr val="222933"/>
                 </a:solidFill>
                 <a:latin typeface="맑은 고딕"/>
               </a:rPr>
-              <a:t>•  지금: 받은 메시지를 접속자 전원에게 broadcast</a:t>
+              <a:t>•  </a:t>
+            </a:r>
+            <a:r>
+              <a:rPr sz="2200" b="1" dirty="0" err="1">
+                <a:solidFill>
+                  <a:srgbClr val="222933"/>
+                </a:solidFill>
+                <a:latin typeface="맑은 고딕"/>
+              </a:rPr>
+              <a:t>지금</a:t>
+            </a:r>
+            <a:r>
+              <a:rPr sz="2200" b="1" dirty="0">
+                <a:solidFill>
+                  <a:srgbClr val="222933"/>
+                </a:solidFill>
+                <a:latin typeface="맑은 고딕"/>
+              </a:rPr>
+              <a:t>: </a:t>
+            </a:r>
+            <a:r>
+              <a:rPr sz="2200" b="1" dirty="0" err="1">
+                <a:solidFill>
+                  <a:srgbClr val="222933"/>
+                </a:solidFill>
+                <a:latin typeface="맑은 고딕"/>
+              </a:rPr>
+              <a:t>받은</a:t>
+            </a:r>
+            <a:r>
+              <a:rPr sz="2200" b="1" dirty="0">
+                <a:solidFill>
+                  <a:srgbClr val="222933"/>
+                </a:solidFill>
+                <a:latin typeface="맑은 고딕"/>
+              </a:rPr>
+              <a:t> </a:t>
+            </a:r>
+            <a:r>
+              <a:rPr sz="2200" b="1" dirty="0" err="1">
+                <a:solidFill>
+                  <a:srgbClr val="222933"/>
+                </a:solidFill>
+                <a:latin typeface="맑은 고딕"/>
+              </a:rPr>
+              <a:t>메시지를</a:t>
+            </a:r>
+            <a:r>
+              <a:rPr sz="2200" b="1" dirty="0">
+                <a:solidFill>
+                  <a:srgbClr val="222933"/>
+                </a:solidFill>
+                <a:latin typeface="맑은 고딕"/>
+              </a:rPr>
+              <a:t> </a:t>
+            </a:r>
+            <a:r>
+              <a:rPr sz="2200" b="1" dirty="0" err="1">
+                <a:solidFill>
+                  <a:srgbClr val="222933"/>
+                </a:solidFill>
+                <a:latin typeface="맑은 고딕"/>
+              </a:rPr>
+              <a:t>접속자</a:t>
+            </a:r>
+            <a:r>
+              <a:rPr sz="2200" b="1" dirty="0">
+                <a:solidFill>
+                  <a:srgbClr val="222933"/>
+                </a:solidFill>
+                <a:latin typeface="맑은 고딕"/>
+              </a:rPr>
+              <a:t> </a:t>
+            </a:r>
+            <a:r>
+              <a:rPr sz="2200" b="1" dirty="0" err="1">
+                <a:solidFill>
+                  <a:srgbClr val="222933"/>
+                </a:solidFill>
+                <a:latin typeface="맑은 고딕"/>
+              </a:rPr>
+              <a:t>전원에게</a:t>
+            </a:r>
+            <a:r>
+              <a:rPr sz="2200" b="1" dirty="0">
+                <a:solidFill>
+                  <a:srgbClr val="222933"/>
+                </a:solidFill>
+                <a:latin typeface="맑은 고딕"/>
+              </a:rPr>
+              <a:t> broadcast</a:t>
             </a:r>
           </a:p>
           <a:p>
@@ -5561,14 +6426,83 @@
               </a:spcAft>
             </a:pPr>
             <a:r>
-              <a:rPr sz="2200" b="1">
+              <a:rPr sz="2200" b="1" dirty="0">
                 <a:solidFill>
                   <a:srgbClr val="222933"/>
                 </a:solidFill>
                 <a:latin typeface="맑은 고딕"/>
               </a:rPr>
-              <a:t>•  방이 생기면: '이 방 멤버에게만' 보낸다</a:t>
-            </a:r>
+              <a:t>•  </a:t>
+            </a:r>
+            <a:r>
+              <a:rPr sz="2200" b="1" dirty="0" err="1">
+                <a:solidFill>
+                  <a:srgbClr val="222933"/>
+                </a:solidFill>
+                <a:latin typeface="맑은 고딕"/>
+              </a:rPr>
+              <a:t>방이</a:t>
+            </a:r>
+            <a:r>
+              <a:rPr sz="2200" b="1" dirty="0">
+                <a:solidFill>
+                  <a:srgbClr val="222933"/>
+                </a:solidFill>
+                <a:latin typeface="맑은 고딕"/>
+              </a:rPr>
+              <a:t> </a:t>
+            </a:r>
+            <a:r>
+              <a:rPr sz="2200" b="1" dirty="0" err="1">
+                <a:solidFill>
+                  <a:srgbClr val="222933"/>
+                </a:solidFill>
+                <a:latin typeface="맑은 고딕"/>
+              </a:rPr>
+              <a:t>생기면</a:t>
+            </a:r>
+            <a:r>
+              <a:rPr sz="2200" b="1" dirty="0">
+                <a:solidFill>
+                  <a:srgbClr val="222933"/>
+                </a:solidFill>
+                <a:latin typeface="맑은 고딕"/>
+              </a:rPr>
+              <a:t>: '이 방 </a:t>
+            </a:r>
+            <a:r>
+              <a:rPr sz="2200" b="1" dirty="0" err="1">
+                <a:solidFill>
+                  <a:srgbClr val="222933"/>
+                </a:solidFill>
+                <a:latin typeface="맑은 고딕"/>
+              </a:rPr>
+              <a:t>멤버에게만</a:t>
+            </a:r>
+            <a:r>
+              <a:rPr sz="2200" b="1" dirty="0">
+                <a:solidFill>
+                  <a:srgbClr val="222933"/>
+                </a:solidFill>
+                <a:latin typeface="맑은 고딕"/>
+              </a:rPr>
+              <a:t>' </a:t>
+            </a:r>
+            <a:r>
+              <a:rPr sz="2200" b="1" dirty="0" err="1">
+                <a:solidFill>
+                  <a:srgbClr val="222933"/>
+                </a:solidFill>
+                <a:latin typeface="맑은 고딕"/>
+              </a:rPr>
+              <a:t>보낸다</a:t>
+            </a:r>
+            <a:endParaRPr sz="2200" b="1" dirty="0">
+              <a:solidFill>
+                <a:srgbClr val="222933"/>
+              </a:solidFill>
+              <a:latin typeface="맑은 고딕"/>
+            </a:endParaRPr>
           </a:p>
           <a:p>
             <a:pPr>
@@ -5580,13 +6514,103 @@
               </a:spcAft>
             </a:pPr>
             <a:r>
-              <a:rPr sz="2200" b="1">
+              <a:rPr sz="2200" b="1" dirty="0">
                 <a:solidFill>
                   <a:srgbClr val="222933"/>
                 </a:solidFill>
                 <a:latin typeface="맑은 고딕"/>
               </a:rPr>
-              <a:t>•  라우팅(routing) = 메시지를 어디로 보낼지 결정하는 것</a:t>
+              <a:t>•  </a:t>
+            </a:r>
+            <a:r>
+              <a:rPr sz="2200" b="1" dirty="0" err="1">
+                <a:solidFill>
+                  <a:srgbClr val="222933"/>
+                </a:solidFill>
+                <a:latin typeface="맑은 고딕"/>
+              </a:rPr>
+              <a:t>라우팅</a:t>
+            </a:r>
+            <a:r>
+              <a:rPr sz="2200" b="1" dirty="0">
+                <a:solidFill>
+                  <a:srgbClr val="222933"/>
+                </a:solidFill>
+                <a:latin typeface="맑은 고딕"/>
+              </a:rPr>
+              <a:t>(routing) = </a:t>
+            </a:r>
+            <a:r>
+              <a:rPr sz="2200" b="1" dirty="0" err="1">
+                <a:solidFill>
+                  <a:srgbClr val="222933"/>
+                </a:solidFill>
+                <a:latin typeface="맑은 고딕"/>
+              </a:rPr>
+              <a:t>메시지를</a:t>
+            </a:r>
+            <a:r>
+              <a:rPr sz="2200" b="1" dirty="0">
+                <a:solidFill>
+                  <a:srgbClr val="222933"/>
+                </a:solidFill>
+                <a:latin typeface="맑은 고딕"/>
+              </a:rPr>
+              <a:t> </a:t>
+            </a:r>
+            <a:r>
+              <a:rPr sz="2200" b="1" dirty="0" err="1">
+                <a:solidFill>
+                  <a:srgbClr val="222933"/>
+                </a:solidFill>
+                <a:latin typeface="맑은 고딕"/>
+              </a:rPr>
+              <a:t>어디로</a:t>
+            </a:r>
+            <a:r>
+              <a:rPr sz="2200" b="1" dirty="0">
+                <a:solidFill>
+                  <a:srgbClr val="222933"/>
+                </a:solidFill>
+                <a:latin typeface="맑은 고딕"/>
+              </a:rPr>
+              <a:t> </a:t>
+            </a:r>
+            <a:r>
+              <a:rPr sz="2200" b="1" dirty="0" err="1">
+                <a:solidFill>
+                  <a:srgbClr val="222933"/>
+                </a:solidFill>
+                <a:latin typeface="맑은 고딕"/>
+              </a:rPr>
+              <a:t>보낼지</a:t>
+            </a:r>
+            <a:r>
+              <a:rPr sz="2200" b="1" dirty="0">
+                <a:solidFill>
+                  <a:srgbClr val="222933"/>
+                </a:solidFill>
+                <a:latin typeface="맑은 고딕"/>
+              </a:rPr>
+              <a:t> </a:t>
+            </a:r>
+            <a:r>
+              <a:rPr sz="2200" b="1" dirty="0" err="1">
+                <a:solidFill>
+                  <a:srgbClr val="222933"/>
+                </a:solidFill>
+                <a:latin typeface="맑은 고딕"/>
+              </a:rPr>
+              <a:t>결정하는</a:t>
+            </a:r>
+            <a:r>
+              <a:rPr sz="2200" b="1" dirty="0">
+                <a:solidFill>
+                  <a:srgbClr val="222933"/>
+                </a:solidFill>
+                <a:latin typeface="맑은 고딕"/>
+              </a:rPr>
+              <a:t> 것</a:t>
             </a:r>
           </a:p>
           <a:p>
@@ -5599,13 +6623,85 @@
               </a:spcAft>
             </a:pPr>
             <a:r>
-              <a:rPr sz="2200" b="1">
+              <a:rPr sz="2200" b="1" dirty="0">
                 <a:solidFill>
                   <a:srgbClr val="222933"/>
                 </a:solidFill>
                 <a:latin typeface="맑은 고딕"/>
               </a:rPr>
-              <a:t>•  필요한 명령: /create(방 만들기), /join(입장), /leave, /rooms, /who</a:t>
+              <a:t>•  </a:t>
+            </a:r>
+            <a:r>
+              <a:rPr sz="2200" b="1" dirty="0" err="1">
+                <a:solidFill>
+                  <a:srgbClr val="222933"/>
+                </a:solidFill>
+                <a:latin typeface="맑은 고딕"/>
+              </a:rPr>
+              <a:t>필요한</a:t>
+            </a:r>
+            <a:r>
+              <a:rPr sz="2200" b="1" dirty="0">
+                <a:solidFill>
+                  <a:srgbClr val="222933"/>
+                </a:solidFill>
+                <a:latin typeface="맑은 고딕"/>
+              </a:rPr>
+              <a:t> </a:t>
+            </a:r>
+            <a:r>
+              <a:rPr sz="2200" b="1" dirty="0" err="1">
+                <a:solidFill>
+                  <a:srgbClr val="222933"/>
+                </a:solidFill>
+                <a:latin typeface="맑은 고딕"/>
+              </a:rPr>
+              <a:t>명령</a:t>
+            </a:r>
+            <a:r>
+              <a:rPr sz="2200" b="1" dirty="0">
+                <a:solidFill>
+                  <a:srgbClr val="222933"/>
+                </a:solidFill>
+                <a:latin typeface="맑은 고딕"/>
+              </a:rPr>
+              <a:t>: /create(방 </a:t>
+            </a:r>
+            <a:r>
+              <a:rPr sz="2200" b="1" dirty="0" err="1">
+                <a:solidFill>
+                  <a:srgbClr val="222933"/>
+                </a:solidFill>
+                <a:latin typeface="맑은 고딕"/>
+              </a:rPr>
+              <a:t>만들기</a:t>
+            </a:r>
+            <a:r>
+              <a:rPr sz="2200" b="1" dirty="0">
+                <a:solidFill>
+                  <a:srgbClr val="222933"/>
+                </a:solidFill>
+                <a:latin typeface="맑은 고딕"/>
+              </a:rPr>
+              <a:t>), /join(</a:t>
+            </a:r>
+            <a:r>
+              <a:rPr sz="2200" b="1" dirty="0" err="1">
+                <a:solidFill>
+                  <a:srgbClr val="222933"/>
+                </a:solidFill>
+                <a:latin typeface="맑은 고딕"/>
+              </a:rPr>
+              <a:t>입장</a:t>
+            </a:r>
+            <a:r>
+              <a:rPr sz="2200" b="1" dirty="0">
+                <a:solidFill>
+                  <a:srgbClr val="222933"/>
+                </a:solidFill>
+                <a:latin typeface="맑은 고딕"/>
+              </a:rPr>
+              <a:t>), /leave, /rooms, /who</a:t>
             </a:r>
           </a:p>
         </p:txBody>
